--- a/GenAI/wk3/When to fine tune versus prompt.pptx
+++ b/GenAI/wk3/When to fine tune versus prompt.pptx
@@ -224,7 +224,7 @@
           <a:p>
             <a:fld id="{7BAEECA8-D063-486F-AE31-5020270C1449}" type="datetimeFigureOut">
               <a:rPr lang="en-US" smtClean="0"/>
-              <a:t>3/26/2026</a:t>
+              <a:t>5/20/2026</a:t>
             </a:fld>
             <a:endParaRPr lang="en-US"/>
           </a:p>
@@ -401,7 +401,7 @@
           <a:p>
             <a:fld id="{CB233BD1-3BA8-448D-9D08-7846095EA517}" type="datetimeFigureOut">
               <a:rPr lang="en-US" smtClean="0"/>
-              <a:t>3/26/2026</a:t>
+              <a:t>5/20/2026</a:t>
             </a:fld>
             <a:endParaRPr lang="en-US"/>
           </a:p>
@@ -815,7 +815,7 @@
           <a:p>
             <a:fld id="{6383FAE1-13DE-4511-8C1B-C8AFB720664C}" type="datetimeFigureOut">
               <a:rPr lang="en-US" smtClean="0"/>
-              <a:t>3/26/2026</a:t>
+              <a:t>5/20/2026</a:t>
             </a:fld>
             <a:endParaRPr lang="en-US"/>
           </a:p>
@@ -1013,7 +1013,7 @@
           <a:p>
             <a:fld id="{6383FAE1-13DE-4511-8C1B-C8AFB720664C}" type="datetimeFigureOut">
               <a:rPr lang="en-US" smtClean="0"/>
-              <a:t>3/26/2026</a:t>
+              <a:t>5/20/2026</a:t>
             </a:fld>
             <a:endParaRPr lang="en-US"/>
           </a:p>
@@ -1221,7 +1221,7 @@
           <a:p>
             <a:fld id="{6383FAE1-13DE-4511-8C1B-C8AFB720664C}" type="datetimeFigureOut">
               <a:rPr lang="en-US" smtClean="0"/>
-              <a:t>3/26/2026</a:t>
+              <a:t>5/20/2026</a:t>
             </a:fld>
             <a:endParaRPr lang="en-US"/>
           </a:p>
@@ -1419,7 +1419,7 @@
           <a:p>
             <a:fld id="{6383FAE1-13DE-4511-8C1B-C8AFB720664C}" type="datetimeFigureOut">
               <a:rPr lang="en-US" smtClean="0"/>
-              <a:t>3/26/2026</a:t>
+              <a:t>5/20/2026</a:t>
             </a:fld>
             <a:endParaRPr lang="en-US"/>
           </a:p>
@@ -1694,7 +1694,7 @@
           <a:p>
             <a:fld id="{6383FAE1-13DE-4511-8C1B-C8AFB720664C}" type="datetimeFigureOut">
               <a:rPr lang="en-US" smtClean="0"/>
-              <a:t>3/26/2026</a:t>
+              <a:t>5/20/2026</a:t>
             </a:fld>
             <a:endParaRPr lang="en-US"/>
           </a:p>
@@ -1959,7 +1959,7 @@
           <a:p>
             <a:fld id="{6383FAE1-13DE-4511-8C1B-C8AFB720664C}" type="datetimeFigureOut">
               <a:rPr lang="en-US" smtClean="0"/>
-              <a:t>3/26/2026</a:t>
+              <a:t>5/20/2026</a:t>
             </a:fld>
             <a:endParaRPr lang="en-US"/>
           </a:p>
@@ -2371,7 +2371,7 @@
           <a:p>
             <a:fld id="{6383FAE1-13DE-4511-8C1B-C8AFB720664C}" type="datetimeFigureOut">
               <a:rPr lang="en-US" smtClean="0"/>
-              <a:t>3/26/2026</a:t>
+              <a:t>5/20/2026</a:t>
             </a:fld>
             <a:endParaRPr lang="en-US"/>
           </a:p>
@@ -2512,7 +2512,7 @@
           <a:p>
             <a:fld id="{6383FAE1-13DE-4511-8C1B-C8AFB720664C}" type="datetimeFigureOut">
               <a:rPr lang="en-US" smtClean="0"/>
-              <a:t>3/26/2026</a:t>
+              <a:t>5/20/2026</a:t>
             </a:fld>
             <a:endParaRPr lang="en-US"/>
           </a:p>
@@ -2625,7 +2625,7 @@
           <a:p>
             <a:fld id="{6383FAE1-13DE-4511-8C1B-C8AFB720664C}" type="datetimeFigureOut">
               <a:rPr lang="en-US" smtClean="0"/>
-              <a:t>3/26/2026</a:t>
+              <a:t>5/20/2026</a:t>
             </a:fld>
             <a:endParaRPr lang="en-US"/>
           </a:p>
@@ -2936,7 +2936,7 @@
           <a:p>
             <a:fld id="{6383FAE1-13DE-4511-8C1B-C8AFB720664C}" type="datetimeFigureOut">
               <a:rPr lang="en-US" smtClean="0"/>
-              <a:t>3/26/2026</a:t>
+              <a:t>5/20/2026</a:t>
             </a:fld>
             <a:endParaRPr lang="en-US"/>
           </a:p>
@@ -3227,7 +3227,7 @@
           <a:p>
             <a:fld id="{6383FAE1-13DE-4511-8C1B-C8AFB720664C}" type="datetimeFigureOut">
               <a:rPr lang="en-US" smtClean="0"/>
-              <a:t>3/26/2026</a:t>
+              <a:t>5/20/2026</a:t>
             </a:fld>
             <a:endParaRPr lang="en-US"/>
           </a:p>
@@ -3471,7 +3471,7 @@
           <a:p>
             <a:fld id="{6383FAE1-13DE-4511-8C1B-C8AFB720664C}" type="datetimeFigureOut">
               <a:rPr lang="en-US" smtClean="0"/>
-              <a:t>3/26/2026</a:t>
+              <a:t>5/20/2026</a:t>
             </a:fld>
             <a:endParaRPr lang="en-US"/>
           </a:p>
@@ -4782,7 +4782,7 @@
                         <a:buNone/>
                       </a:pPr>
                       <a:r>
-                        <a:rPr lang="en-US" sz="2400">
+                        <a:rPr lang="en-US" sz="2400" dirty="0">
                           <a:solidFill>
                             <a:schemeClr val="accent6">
                               <a:lumMod val="60000"/>
@@ -4819,7 +4819,7 @@
                         <a:buNone/>
                       </a:pPr>
                       <a:r>
-                        <a:rPr lang="en-US" sz="2400">
+                        <a:rPr lang="en-US" sz="2400" dirty="0">
                           <a:solidFill>
                             <a:schemeClr val="accent6">
                               <a:lumMod val="60000"/>
@@ -4937,7 +4937,7 @@
                         <a:buNone/>
                       </a:pPr>
                       <a:r>
-                        <a:rPr lang="en-US" sz="2400">
+                        <a:rPr lang="en-US" sz="2400" dirty="0">
                           <a:solidFill>
                             <a:schemeClr val="accent6">
                               <a:lumMod val="60000"/>
@@ -5055,7 +5055,7 @@
                         <a:buNone/>
                       </a:pPr>
                       <a:r>
-                        <a:rPr lang="en-US" sz="2400">
+                        <a:rPr lang="en-US" sz="2400" dirty="0">
                           <a:solidFill>
                             <a:schemeClr val="accent6">
                               <a:lumMod val="60000"/>
@@ -5173,7 +5173,7 @@
                         <a:buNone/>
                       </a:pPr>
                       <a:r>
-                        <a:rPr lang="en-US" sz="2400">
+                        <a:rPr lang="en-US" sz="2400" dirty="0">
                           <a:solidFill>
                             <a:schemeClr val="accent6">
                               <a:lumMod val="60000"/>
@@ -5291,7 +5291,7 @@
                         <a:buNone/>
                       </a:pPr>
                       <a:r>
-                        <a:rPr lang="en-US" sz="2400">
+                        <a:rPr lang="en-US" sz="2400" dirty="0">
                           <a:solidFill>
                             <a:schemeClr val="accent6">
                               <a:lumMod val="60000"/>
@@ -5497,8 +5497,8 @@
         </p:nvSpPr>
         <p:spPr>
           <a:xfrm>
-            <a:off x="477520" y="418560"/>
-            <a:ext cx="10292080" cy="5632311"/>
+            <a:off x="367792" y="0"/>
+            <a:ext cx="10961624" cy="6740307"/>
           </a:xfrm>
           <a:prstGeom prst="rect">
             <a:avLst/>
@@ -5696,10 +5696,8 @@
                   </a:schemeClr>
                 </a:solidFill>
               </a:rPr>
-              <a:t>💡 Example</a:t>
-            </a:r>
-          </a:p>
-          <a:p>
+              <a:t>💡 Example: </a:t>
+            </a:r>
             <a:r>
               <a:rPr lang="en-US" sz="2400" dirty="0">
                 <a:solidFill>
@@ -5709,7 +5707,20 @@
                   </a:schemeClr>
                 </a:solidFill>
               </a:rPr>
-              <a:t>"You are a medical expert. Explain diabetes in simple terms."</a:t>
+              <a:t>You want medical advice</a:t>
+            </a:r>
+          </a:p>
+          <a:p>
+            <a:r>
+              <a:rPr lang="en-US" sz="2400" dirty="0">
+                <a:solidFill>
+                  <a:schemeClr val="accent6">
+                    <a:lumMod val="60000"/>
+                    <a:lumOff val="40000"/>
+                  </a:schemeClr>
+                </a:solidFill>
+              </a:rPr>
+              <a:t>"You are a medical expert. Explain Type 2 diabetes in simple terms. If you  do not know the answer, say I do not know."</a:t>
             </a:r>
           </a:p>
           <a:p>
@@ -5733,6 +5744,29 @@
                 </a:solidFill>
               </a:rPr>
               <a:t>👉 You can change behavior instantly just by changing prompt.</a:t>
+            </a:r>
+          </a:p>
+          <a:p>
+            <a:endParaRPr lang="en-US" sz="2400" dirty="0">
+              <a:solidFill>
+                <a:schemeClr val="accent6">
+                  <a:lumMod val="60000"/>
+                  <a:lumOff val="40000"/>
+                </a:schemeClr>
+              </a:solidFill>
+            </a:endParaRPr>
+          </a:p>
+          <a:p>
+            <a:r>
+              <a:rPr lang="en-US" sz="2400" dirty="0">
+                <a:solidFill>
+                  <a:schemeClr val="accent6">
+                    <a:lumMod val="60000"/>
+                    <a:lumOff val="40000"/>
+                  </a:schemeClr>
+                </a:solidFill>
+              </a:rPr>
+              <a:t>"You are a software architect. How should I design RAG system for FinTech company"</a:t>
             </a:r>
           </a:p>
         </p:txBody>
@@ -5788,7 +5822,7 @@
         <p:spPr>
           <a:xfrm>
             <a:off x="477520" y="418560"/>
-            <a:ext cx="10292080" cy="5632311"/>
+            <a:ext cx="10292080" cy="4154984"/>
           </a:xfrm>
           <a:prstGeom prst="rect">
             <a:avLst/>
@@ -5824,6 +5858,10 @@
             </a:endParaRPr>
           </a:p>
           <a:p>
+            <a:pPr marL="342900" indent="-342900">
+              <a:buFont typeface="Arial" panose="020B0604020202020204" pitchFamily="34" charset="0"/>
+              <a:buChar char="•"/>
+            </a:pPr>
             <a:r>
               <a:rPr lang="en-US" sz="2400" b="1" dirty="0">
                 <a:solidFill>
@@ -5848,7 +5886,10 @@
             </a:r>
           </a:p>
           <a:p>
-            <a:pPr lvl="1"/>
+            <a:pPr marL="800100" lvl="1" indent="-342900">
+              <a:buFont typeface="Arial" panose="020B0604020202020204" pitchFamily="34" charset="0"/>
+              <a:buChar char="•"/>
+            </a:pPr>
             <a:r>
               <a:rPr lang="en-US" sz="2400" dirty="0">
                 <a:solidFill>
@@ -5862,7 +5903,10 @@
             </a:r>
           </a:p>
           <a:p>
-            <a:pPr lvl="1"/>
+            <a:pPr marL="800100" lvl="1" indent="-342900">
+              <a:buFont typeface="Arial" panose="020B0604020202020204" pitchFamily="34" charset="0"/>
+              <a:buChar char="•"/>
+            </a:pPr>
             <a:r>
               <a:rPr lang="en-US" sz="2400" dirty="0">
                 <a:solidFill>
@@ -5886,6 +5930,10 @@
             </a:endParaRPr>
           </a:p>
           <a:p>
+            <a:pPr marL="342900" indent="-342900">
+              <a:buFont typeface="Arial" panose="020B0604020202020204" pitchFamily="34" charset="0"/>
+              <a:buChar char="•"/>
+            </a:pPr>
             <a:r>
               <a:rPr lang="en-US" sz="2400" b="1" dirty="0">
                 <a:solidFill>
@@ -5895,7 +5943,7 @@
                   </a:schemeClr>
                 </a:solidFill>
               </a:rPr>
-              <a:t>You need flexibility</a:t>
+              <a:t>You don’t have training data</a:t>
             </a:r>
             <a:r>
               <a:rPr lang="en-US" sz="2400" dirty="0">
@@ -5910,7 +5958,10 @@
             </a:r>
           </a:p>
           <a:p>
-            <a:pPr lvl="1"/>
+            <a:pPr marL="800100" lvl="1" indent="-342900">
+              <a:buFont typeface="Arial" panose="020B0604020202020204" pitchFamily="34" charset="0"/>
+              <a:buChar char="•"/>
+            </a:pPr>
             <a:r>
               <a:rPr lang="en-US" sz="2400" dirty="0">
                 <a:solidFill>
@@ -5920,21 +5971,7 @@
                   </a:schemeClr>
                 </a:solidFill>
               </a:rPr>
-              <a:t>Different tone (formal, casual) </a:t>
-            </a:r>
-          </a:p>
-          <a:p>
-            <a:pPr lvl="1"/>
-            <a:r>
-              <a:rPr lang="en-US" sz="2400" dirty="0">
-                <a:solidFill>
-                  <a:schemeClr val="accent6">
-                    <a:lumMod val="60000"/>
-                    <a:lumOff val="40000"/>
-                  </a:schemeClr>
-                </a:solidFill>
-              </a:rPr>
-              <a:t>Different outputs (summary, code, explanation) </a:t>
+              <a:t>No dataset → no fine-tuning </a:t>
             </a:r>
           </a:p>
           <a:p>
@@ -5948,6 +5985,10 @@
             </a:endParaRPr>
           </a:p>
           <a:p>
+            <a:pPr marL="342900" indent="-342900">
+              <a:buFont typeface="Arial" panose="020B0604020202020204" pitchFamily="34" charset="0"/>
+              <a:buChar char="•"/>
+            </a:pPr>
             <a:r>
               <a:rPr lang="en-US" sz="2400" b="1" dirty="0">
                 <a:solidFill>
@@ -5957,7 +5998,7 @@
                   </a:schemeClr>
                 </a:solidFill>
               </a:rPr>
-              <a:t>You don’t have training data</a:t>
+              <a:t>You are using RAG</a:t>
             </a:r>
             <a:r>
               <a:rPr lang="en-US" sz="2400" dirty="0">
@@ -5972,55 +6013,10 @@
             </a:r>
           </a:p>
           <a:p>
-            <a:pPr lvl="1"/>
-            <a:r>
-              <a:rPr lang="en-US" sz="2400" dirty="0">
-                <a:solidFill>
-                  <a:schemeClr val="accent6">
-                    <a:lumMod val="60000"/>
-                    <a:lumOff val="40000"/>
-                  </a:schemeClr>
-                </a:solidFill>
-              </a:rPr>
-              <a:t>No dataset → no fine-tuning </a:t>
-            </a:r>
-          </a:p>
-          <a:p>
-            <a:endParaRPr lang="en-US" sz="2400" b="1" dirty="0">
-              <a:solidFill>
-                <a:schemeClr val="accent6">
-                  <a:lumMod val="60000"/>
-                  <a:lumOff val="40000"/>
-                </a:schemeClr>
-              </a:solidFill>
-            </a:endParaRPr>
-          </a:p>
-          <a:p>
-            <a:r>
-              <a:rPr lang="en-US" sz="2400" b="1" dirty="0">
-                <a:solidFill>
-                  <a:schemeClr val="accent6">
-                    <a:lumMod val="60000"/>
-                    <a:lumOff val="40000"/>
-                  </a:schemeClr>
-                </a:solidFill>
-              </a:rPr>
-              <a:t>You are using RAG</a:t>
-            </a:r>
-            <a:r>
-              <a:rPr lang="en-US" sz="2400" dirty="0">
-                <a:solidFill>
-                  <a:schemeClr val="accent6">
-                    <a:lumMod val="60000"/>
-                    <a:lumOff val="40000"/>
-                  </a:schemeClr>
-                </a:solidFill>
-              </a:rPr>
-              <a:t> </a:t>
-            </a:r>
-          </a:p>
-          <a:p>
-            <a:pPr lvl="1"/>
+            <a:pPr marL="800100" lvl="1" indent="-342900">
+              <a:buFont typeface="Arial" panose="020B0604020202020204" pitchFamily="34" charset="0"/>
+              <a:buChar char="•"/>
+            </a:pPr>
             <a:r>
               <a:rPr lang="en-US" sz="2400" dirty="0">
                 <a:solidFill>
@@ -6086,7 +6082,7 @@
         <p:spPr>
           <a:xfrm>
             <a:off x="148336" y="418560"/>
-            <a:ext cx="7688072" cy="3416320"/>
+            <a:ext cx="7633208" cy="3046988"/>
           </a:xfrm>
           <a:prstGeom prst="rect">
             <a:avLst/>
@@ -6193,7 +6189,7 @@
                   </a:schemeClr>
                 </a:solidFill>
               </a:rPr>
-              <a:t>Repetitive structured outputs </a:t>
+              <a:t>Repetitive structured outputs - Style consistency </a:t>
             </a:r>
           </a:p>
           <a:p>
@@ -6227,23 +6223,6 @@
                   </a:schemeClr>
                 </a:solidFill>
               </a:rPr>
-              <a:t>Style consistency </a:t>
-            </a:r>
-          </a:p>
-          <a:p>
-            <a:pPr marL="342900" indent="-342900">
-              <a:buFont typeface="Arial" panose="020B0604020202020204" pitchFamily="34" charset="0"/>
-              <a:buChar char="•"/>
-            </a:pPr>
-            <a:r>
-              <a:rPr lang="en-US" sz="2400" dirty="0">
-                <a:solidFill>
-                  <a:schemeClr val="accent6">
-                    <a:lumMod val="60000"/>
-                    <a:lumOff val="40000"/>
-                  </a:schemeClr>
-                </a:solidFill>
-              </a:rPr>
               <a:t>Reducing prompt size</a:t>
             </a:r>
           </a:p>
@@ -6263,7 +6242,7 @@
         </p:nvSpPr>
         <p:spPr>
           <a:xfrm>
-            <a:off x="5020056" y="2274838"/>
+            <a:off x="4873752" y="2750326"/>
             <a:ext cx="7072884" cy="3785652"/>
           </a:xfrm>
           <a:prstGeom prst="rect">
@@ -6508,7 +6487,7 @@
         <p:spPr>
           <a:xfrm>
             <a:off x="148336" y="418560"/>
-            <a:ext cx="5947664" cy="5262979"/>
+            <a:ext cx="6279896" cy="5262979"/>
           </a:xfrm>
           <a:prstGeom prst="rect">
             <a:avLst/>
@@ -6544,6 +6523,10 @@
             </a:endParaRPr>
           </a:p>
           <a:p>
+            <a:pPr marL="342900" indent="-342900">
+              <a:buFont typeface="Arial" panose="020B0604020202020204" pitchFamily="34" charset="0"/>
+              <a:buChar char="•"/>
+            </a:pPr>
             <a:r>
               <a:rPr lang="en-US" sz="2400" b="1" dirty="0">
                 <a:solidFill>
@@ -6568,7 +6551,10 @@
             </a:r>
           </a:p>
           <a:p>
-            <a:pPr lvl="1"/>
+            <a:pPr marL="800100" lvl="1" indent="-342900">
+              <a:buFont typeface="Arial" panose="020B0604020202020204" pitchFamily="34" charset="0"/>
+              <a:buChar char="•"/>
+            </a:pPr>
             <a:r>
               <a:rPr lang="en-US" sz="2400" dirty="0">
                 <a:solidFill>
@@ -6582,7 +6568,10 @@
             </a:r>
           </a:p>
           <a:p>
-            <a:pPr lvl="1"/>
+            <a:pPr marL="800100" lvl="1" indent="-342900">
+              <a:buFont typeface="Arial" panose="020B0604020202020204" pitchFamily="34" charset="0"/>
+              <a:buChar char="•"/>
+            </a:pPr>
             <a:r>
               <a:rPr lang="en-US" sz="2400" dirty="0">
                 <a:solidFill>
@@ -6596,7 +6585,10 @@
             </a:r>
           </a:p>
           <a:p>
-            <a:pPr lvl="1"/>
+            <a:pPr marL="800100" lvl="1" indent="-342900">
+              <a:buFont typeface="Arial" panose="020B0604020202020204" pitchFamily="34" charset="0"/>
+              <a:buChar char="•"/>
+            </a:pPr>
             <a:r>
               <a:rPr lang="en-US" sz="2400" dirty="0">
                 <a:solidFill>
@@ -6620,6 +6612,10 @@
             </a:endParaRPr>
           </a:p>
           <a:p>
+            <a:pPr marL="342900" indent="-342900">
+              <a:buFont typeface="Arial" panose="020B0604020202020204" pitchFamily="34" charset="0"/>
+              <a:buChar char="•"/>
+            </a:pPr>
             <a:r>
               <a:rPr lang="en-US" sz="2400" b="1" dirty="0">
                 <a:solidFill>
@@ -6644,7 +6640,10 @@
             </a:r>
           </a:p>
           <a:p>
-            <a:pPr lvl="1"/>
+            <a:pPr marL="800100" lvl="1" indent="-342900">
+              <a:buFont typeface="Arial" panose="020B0604020202020204" pitchFamily="34" charset="0"/>
+              <a:buChar char="•"/>
+            </a:pPr>
             <a:r>
               <a:rPr lang="en-US" sz="2400" dirty="0">
                 <a:solidFill>
@@ -6668,6 +6667,10 @@
             </a:endParaRPr>
           </a:p>
           <a:p>
+            <a:pPr marL="342900" indent="-342900">
+              <a:buFont typeface="Arial" panose="020B0604020202020204" pitchFamily="34" charset="0"/>
+              <a:buChar char="•"/>
+            </a:pPr>
             <a:r>
               <a:rPr lang="en-US" sz="2400" b="1" dirty="0">
                 <a:solidFill>
@@ -6692,7 +6695,10 @@
             </a:r>
           </a:p>
           <a:p>
-            <a:pPr lvl="1"/>
+            <a:pPr marL="800100" lvl="1" indent="-342900">
+              <a:buFont typeface="Arial" panose="020B0604020202020204" pitchFamily="34" charset="0"/>
+              <a:buChar char="•"/>
+            </a:pPr>
             <a:r>
               <a:rPr lang="en-US" sz="2400" dirty="0">
                 <a:solidFill>
@@ -6706,7 +6712,10 @@
             </a:r>
           </a:p>
           <a:p>
-            <a:pPr lvl="2"/>
+            <a:pPr marL="1257300" lvl="2" indent="-342900">
+              <a:buFont typeface="Arial" panose="020B0604020202020204" pitchFamily="34" charset="0"/>
+              <a:buChar char="•"/>
+            </a:pPr>
             <a:r>
               <a:rPr lang="en-US" sz="2400" dirty="0">
                 <a:solidFill>
@@ -6720,7 +6729,10 @@
             </a:r>
           </a:p>
           <a:p>
-            <a:pPr lvl="2"/>
+            <a:pPr marL="1257300" lvl="2" indent="-342900">
+              <a:buFont typeface="Arial" panose="020B0604020202020204" pitchFamily="34" charset="0"/>
+              <a:buChar char="•"/>
+            </a:pPr>
             <a:r>
               <a:rPr lang="en-US" sz="2400" dirty="0">
                 <a:solidFill>
@@ -6749,8 +6761,8 @@
         </p:nvSpPr>
         <p:spPr>
           <a:xfrm>
-            <a:off x="6515100" y="1089690"/>
-            <a:ext cx="5947664" cy="2677656"/>
+            <a:off x="6496812" y="2296698"/>
+            <a:ext cx="5947664" cy="3046988"/>
           </a:xfrm>
           <a:prstGeom prst="rect">
             <a:avLst/>
@@ -6763,6 +6775,10 @@
           </a:bodyPr>
           <a:lstStyle/>
           <a:p>
+            <a:pPr marL="342900" indent="-342900">
+              <a:buFont typeface="Arial" panose="020B0604020202020204" pitchFamily="34" charset="0"/>
+              <a:buChar char="•"/>
+            </a:pPr>
             <a:r>
               <a:rPr lang="en-US" sz="2400" b="1" dirty="0">
                 <a:solidFill>
@@ -6787,7 +6803,10 @@
             </a:r>
           </a:p>
           <a:p>
-            <a:pPr lvl="1"/>
+            <a:pPr marL="800100" lvl="1" indent="-342900">
+              <a:buFont typeface="Arial" panose="020B0604020202020204" pitchFamily="34" charset="0"/>
+              <a:buChar char="•"/>
+            </a:pPr>
             <a:r>
               <a:rPr lang="en-US" sz="2400" dirty="0">
                 <a:solidFill>
@@ -6834,6 +6853,10 @@
             </a:endParaRPr>
           </a:p>
           <a:p>
+            <a:pPr marL="342900" indent="-342900">
+              <a:buFont typeface="Arial" panose="020B0604020202020204" pitchFamily="34" charset="0"/>
+              <a:buChar char="•"/>
+            </a:pPr>
             <a:r>
               <a:rPr lang="en-US" sz="2400" b="1" dirty="0">
                 <a:solidFill>
@@ -6858,7 +6881,10 @@
             </a:r>
           </a:p>
           <a:p>
-            <a:pPr lvl="1"/>
+            <a:pPr marL="800100" lvl="1" indent="-342900">
+              <a:buFont typeface="Arial" panose="020B0604020202020204" pitchFamily="34" charset="0"/>
+              <a:buChar char="•"/>
+            </a:pPr>
             <a:r>
               <a:rPr lang="en-US" sz="2400" dirty="0">
                 <a:solidFill>
@@ -6924,7 +6950,7 @@
         <p:spPr>
           <a:xfrm>
             <a:off x="148336" y="418560"/>
-            <a:ext cx="5947664" cy="2308324"/>
+            <a:ext cx="11162792" cy="2677656"/>
           </a:xfrm>
           <a:prstGeom prst="rect">
             <a:avLst/>
@@ -6946,8 +6972,18 @@
                   </a:schemeClr>
                 </a:solidFill>
               </a:rPr>
-              <a:t>Golden Decision Rule</a:t>
-            </a:r>
+              <a:t>Golden Decision Rule: Prompt or Fine-tune ?</a:t>
+            </a:r>
+          </a:p>
+          <a:p>
+            <a:endParaRPr lang="en-US" sz="2400" b="1" dirty="0">
+              <a:solidFill>
+                <a:schemeClr val="accent6">
+                  <a:lumMod val="60000"/>
+                  <a:lumOff val="40000"/>
+                </a:schemeClr>
+              </a:solidFill>
+            </a:endParaRPr>
           </a:p>
           <a:p>
             <a:r>
@@ -7017,10 +7053,19 @@
                   </a:schemeClr>
                 </a:solidFill>
               </a:rPr>
-              <a:t>Dynamic → ✅ Prompting </a:t>
-            </a:r>
-          </a:p>
-          <a:p>
+              <a:t>Dynamic → ✅ Prompting  (Asking </a:t>
+            </a:r>
+            <a:r>
+              <a:rPr lang="en-US" sz="2400" b="1" dirty="0">
+                <a:solidFill>
+                  <a:schemeClr val="accent6">
+                    <a:lumMod val="60000"/>
+                    <a:lumOff val="40000"/>
+                  </a:schemeClr>
+                </a:solidFill>
+              </a:rPr>
+              <a:t>medical advice/legal advice/Coding advice</a:t>
+            </a:r>
             <a:r>
               <a:rPr lang="en-US" sz="2400" dirty="0">
                 <a:solidFill>
@@ -7030,7 +7075,42 @@
                   </a:schemeClr>
                 </a:solidFill>
               </a:rPr>
-              <a:t>Repetitive → ✅ Fine-tuning</a:t>
+              <a:t>)</a:t>
+            </a:r>
+          </a:p>
+          <a:p>
+            <a:r>
+              <a:rPr lang="en-US" sz="2400" dirty="0">
+                <a:solidFill>
+                  <a:schemeClr val="accent6">
+                    <a:lumMod val="60000"/>
+                    <a:lumOff val="40000"/>
+                  </a:schemeClr>
+                </a:solidFill>
+              </a:rPr>
+              <a:t>Repetitive → ✅ Fine-tuning (Asking </a:t>
+            </a:r>
+            <a:r>
+              <a:rPr lang="en-US" sz="2400" b="1" dirty="0">
+                <a:solidFill>
+                  <a:schemeClr val="accent6">
+                    <a:lumMod val="60000"/>
+                    <a:lumOff val="40000"/>
+                  </a:schemeClr>
+                </a:solidFill>
+              </a:rPr>
+              <a:t>medical advice</a:t>
+            </a:r>
+            <a:r>
+              <a:rPr lang="en-US" sz="2400" dirty="0">
+                <a:solidFill>
+                  <a:schemeClr val="accent6">
+                    <a:lumMod val="60000"/>
+                    <a:lumOff val="40000"/>
+                  </a:schemeClr>
+                </a:solidFill>
+              </a:rPr>
+              <a:t> only)</a:t>
             </a:r>
           </a:p>
         </p:txBody>

--- a/GenAI/wk3/When to fine tune versus prompt.pptx
+++ b/GenAI/wk3/When to fine tune versus prompt.pptx
@@ -224,7 +224,7 @@
           <a:p>
             <a:fld id="{7BAEECA8-D063-486F-AE31-5020270C1449}" type="datetimeFigureOut">
               <a:rPr lang="en-US" smtClean="0"/>
-              <a:t>5/20/2026</a:t>
+              <a:t>6/10/2026</a:t>
             </a:fld>
             <a:endParaRPr lang="en-US"/>
           </a:p>
@@ -401,7 +401,7 @@
           <a:p>
             <a:fld id="{CB233BD1-3BA8-448D-9D08-7846095EA517}" type="datetimeFigureOut">
               <a:rPr lang="en-US" smtClean="0"/>
-              <a:t>5/20/2026</a:t>
+              <a:t>6/10/2026</a:t>
             </a:fld>
             <a:endParaRPr lang="en-US"/>
           </a:p>
@@ -815,7 +815,7 @@
           <a:p>
             <a:fld id="{6383FAE1-13DE-4511-8C1B-C8AFB720664C}" type="datetimeFigureOut">
               <a:rPr lang="en-US" smtClean="0"/>
-              <a:t>5/20/2026</a:t>
+              <a:t>6/10/2026</a:t>
             </a:fld>
             <a:endParaRPr lang="en-US"/>
           </a:p>
@@ -1013,7 +1013,7 @@
           <a:p>
             <a:fld id="{6383FAE1-13DE-4511-8C1B-C8AFB720664C}" type="datetimeFigureOut">
               <a:rPr lang="en-US" smtClean="0"/>
-              <a:t>5/20/2026</a:t>
+              <a:t>6/10/2026</a:t>
             </a:fld>
             <a:endParaRPr lang="en-US"/>
           </a:p>
@@ -1221,7 +1221,7 @@
           <a:p>
             <a:fld id="{6383FAE1-13DE-4511-8C1B-C8AFB720664C}" type="datetimeFigureOut">
               <a:rPr lang="en-US" smtClean="0"/>
-              <a:t>5/20/2026</a:t>
+              <a:t>6/10/2026</a:t>
             </a:fld>
             <a:endParaRPr lang="en-US"/>
           </a:p>
@@ -1419,7 +1419,7 @@
           <a:p>
             <a:fld id="{6383FAE1-13DE-4511-8C1B-C8AFB720664C}" type="datetimeFigureOut">
               <a:rPr lang="en-US" smtClean="0"/>
-              <a:t>5/20/2026</a:t>
+              <a:t>6/10/2026</a:t>
             </a:fld>
             <a:endParaRPr lang="en-US"/>
           </a:p>
@@ -1694,7 +1694,7 @@
           <a:p>
             <a:fld id="{6383FAE1-13DE-4511-8C1B-C8AFB720664C}" type="datetimeFigureOut">
               <a:rPr lang="en-US" smtClean="0"/>
-              <a:t>5/20/2026</a:t>
+              <a:t>6/10/2026</a:t>
             </a:fld>
             <a:endParaRPr lang="en-US"/>
           </a:p>
@@ -1959,7 +1959,7 @@
           <a:p>
             <a:fld id="{6383FAE1-13DE-4511-8C1B-C8AFB720664C}" type="datetimeFigureOut">
               <a:rPr lang="en-US" smtClean="0"/>
-              <a:t>5/20/2026</a:t>
+              <a:t>6/10/2026</a:t>
             </a:fld>
             <a:endParaRPr lang="en-US"/>
           </a:p>
@@ -2371,7 +2371,7 @@
           <a:p>
             <a:fld id="{6383FAE1-13DE-4511-8C1B-C8AFB720664C}" type="datetimeFigureOut">
               <a:rPr lang="en-US" smtClean="0"/>
-              <a:t>5/20/2026</a:t>
+              <a:t>6/10/2026</a:t>
             </a:fld>
             <a:endParaRPr lang="en-US"/>
           </a:p>
@@ -2512,7 +2512,7 @@
           <a:p>
             <a:fld id="{6383FAE1-13DE-4511-8C1B-C8AFB720664C}" type="datetimeFigureOut">
               <a:rPr lang="en-US" smtClean="0"/>
-              <a:t>5/20/2026</a:t>
+              <a:t>6/10/2026</a:t>
             </a:fld>
             <a:endParaRPr lang="en-US"/>
           </a:p>
@@ -2625,7 +2625,7 @@
           <a:p>
             <a:fld id="{6383FAE1-13DE-4511-8C1B-C8AFB720664C}" type="datetimeFigureOut">
               <a:rPr lang="en-US" smtClean="0"/>
-              <a:t>5/20/2026</a:t>
+              <a:t>6/10/2026</a:t>
             </a:fld>
             <a:endParaRPr lang="en-US"/>
           </a:p>
@@ -2936,7 +2936,7 @@
           <a:p>
             <a:fld id="{6383FAE1-13DE-4511-8C1B-C8AFB720664C}" type="datetimeFigureOut">
               <a:rPr lang="en-US" smtClean="0"/>
-              <a:t>5/20/2026</a:t>
+              <a:t>6/10/2026</a:t>
             </a:fld>
             <a:endParaRPr lang="en-US"/>
           </a:p>
@@ -3227,7 +3227,7 @@
           <a:p>
             <a:fld id="{6383FAE1-13DE-4511-8C1B-C8AFB720664C}" type="datetimeFigureOut">
               <a:rPr lang="en-US" smtClean="0"/>
-              <a:t>5/20/2026</a:t>
+              <a:t>6/10/2026</a:t>
             </a:fld>
             <a:endParaRPr lang="en-US"/>
           </a:p>
@@ -3471,7 +3471,7 @@
           <a:p>
             <a:fld id="{6383FAE1-13DE-4511-8C1B-C8AFB720664C}" type="datetimeFigureOut">
               <a:rPr lang="en-US" smtClean="0"/>
-              <a:t>5/20/2026</a:t>
+              <a:t>6/10/2026</a:t>
             </a:fld>
             <a:endParaRPr lang="en-US"/>
           </a:p>
@@ -4900,7 +4900,7 @@
                         <a:buNone/>
                       </a:pPr>
                       <a:r>
-                        <a:rPr lang="en-US" sz="2400">
+                        <a:rPr lang="en-US" sz="2400" dirty="0">
                           <a:solidFill>
                             <a:schemeClr val="accent6">
                               <a:lumMod val="60000"/>
@@ -5254,7 +5254,7 @@
                         <a:buNone/>
                       </a:pPr>
                       <a:r>
-                        <a:rPr lang="en-US" sz="2400">
+                        <a:rPr lang="en-US" sz="2400" dirty="0">
                           <a:solidFill>
                             <a:schemeClr val="accent6">
                               <a:lumMod val="60000"/>
@@ -5372,7 +5372,7 @@
                         <a:buNone/>
                       </a:pPr>
                       <a:r>
-                        <a:rPr lang="en-US" sz="2400">
+                        <a:rPr lang="en-US" sz="2400" dirty="0">
                           <a:solidFill>
                             <a:schemeClr val="accent6">
                               <a:lumMod val="60000"/>
@@ -5498,7 +5498,7 @@
         <p:spPr>
           <a:xfrm>
             <a:off x="367792" y="0"/>
-            <a:ext cx="10961624" cy="6740307"/>
+            <a:ext cx="10961624" cy="6370975"/>
           </a:xfrm>
           <a:prstGeom prst="rect">
             <a:avLst/>
@@ -5714,13 +5714,35 @@
             <a:r>
               <a:rPr lang="en-US" sz="2400" dirty="0">
                 <a:solidFill>
-                  <a:schemeClr val="accent6">
-                    <a:lumMod val="60000"/>
-                    <a:lumOff val="40000"/>
-                  </a:schemeClr>
-                </a:solidFill>
-              </a:rPr>
-              <a:t>"You are a medical expert. Explain Type 2 diabetes in simple terms. If you  do not know the answer, say I do not know."</a:t>
+                  <a:schemeClr val="accent4">
+                    <a:lumMod val="60000"/>
+                    <a:lumOff val="40000"/>
+                  </a:schemeClr>
+                </a:solidFill>
+              </a:rPr>
+              <a:t>"You are a </a:t>
+            </a:r>
+            <a:r>
+              <a:rPr lang="en-US" sz="2400" b="1" u="sng" dirty="0">
+                <a:solidFill>
+                  <a:schemeClr val="accent4">
+                    <a:lumMod val="60000"/>
+                    <a:lumOff val="40000"/>
+                  </a:schemeClr>
+                </a:solidFill>
+              </a:rPr>
+              <a:t>medical expert</a:t>
+            </a:r>
+            <a:r>
+              <a:rPr lang="en-US" sz="2400" dirty="0">
+                <a:solidFill>
+                  <a:schemeClr val="accent4">
+                    <a:lumMod val="60000"/>
+                    <a:lumOff val="40000"/>
+                  </a:schemeClr>
+                </a:solidFill>
+              </a:rPr>
+              <a:t>. Explain Type 2 diabetes in simple terms. If you  do not know the answer, say I do not know."</a:t>
             </a:r>
           </a:p>
           <a:p>
@@ -5747,26 +5769,38 @@
             </a:r>
           </a:p>
           <a:p>
-            <a:endParaRPr lang="en-US" sz="2400" dirty="0">
-              <a:solidFill>
-                <a:schemeClr val="accent6">
-                  <a:lumMod val="60000"/>
-                  <a:lumOff val="40000"/>
-                </a:schemeClr>
-              </a:solidFill>
-            </a:endParaRPr>
-          </a:p>
-          <a:p>
             <a:r>
               <a:rPr lang="en-US" sz="2400" dirty="0">
                 <a:solidFill>
-                  <a:schemeClr val="accent6">
-                    <a:lumMod val="60000"/>
-                    <a:lumOff val="40000"/>
-                  </a:schemeClr>
-                </a:solidFill>
-              </a:rPr>
-              <a:t>"You are a software architect. How should I design RAG system for FinTech company"</a:t>
+                  <a:schemeClr val="accent4">
+                    <a:lumMod val="60000"/>
+                    <a:lumOff val="40000"/>
+                  </a:schemeClr>
+                </a:solidFill>
+              </a:rPr>
+              <a:t>"You are a </a:t>
+            </a:r>
+            <a:r>
+              <a:rPr lang="en-US" sz="2400" b="1" u="sng" dirty="0">
+                <a:solidFill>
+                  <a:schemeClr val="accent4">
+                    <a:lumMod val="60000"/>
+                    <a:lumOff val="40000"/>
+                  </a:schemeClr>
+                </a:solidFill>
+              </a:rPr>
+              <a:t>software architect</a:t>
+            </a:r>
+            <a:r>
+              <a:rPr lang="en-US" sz="2400" dirty="0">
+                <a:solidFill>
+                  <a:schemeClr val="accent4">
+                    <a:lumMod val="60000"/>
+                    <a:lumOff val="40000"/>
+                  </a:schemeClr>
+                </a:solidFill>
+              </a:rPr>
+              <a:t>. How should I design RAG system for FinTech company"</a:t>
             </a:r>
           </a:p>
         </p:txBody>
